--- a/viewers/pptx/e2e/fixtures/background-alpha.pptx
+++ b/viewers/pptx/e2e/fixtures/background-alpha.pptx
@@ -6,6 +6,7 @@
   </p:sldMasterIdLst>
   <p:sldIdLst>
     <p:sldId id="256" r:id="rId2"/>
+    <p:sldId id="257" r:id="rId3"/>
   </p:sldIdLst>
   <p:sldSz cx="9144000" cy="5143500"/>
   <p:notesSz cx="5143500" cy="9144000"/>
@@ -99,6 +100,65 @@
             <a:r>
               <a:rPr lang="en-US"/>
               <a:t>Background alpha marker</a:t>
+            </a:r>
+          </a:p>
+        </p:txBody>
+      </p:sp>
+    </p:spTree>
+  </p:cSld>
+  <p:clrMapOvr>
+    <a:masterClrMapping/>
+  </p:clrMapOvr>
+</p:sld>
+</file>
+
+<file path=ppt/slides/slide2.xml><?xml version="1.0" encoding="utf-8"?>
+<p:sld xmlns:a="http://schemas.openxmlformats.org/drawingml/2006/main" xmlns:r="http://schemas.openxmlformats.org/officeDocument/2006/relationships" xmlns:p="http://schemas.openxmlformats.org/presentationml/2006/main">
+  <p:cSld>
+    <p:bg>
+      <p:bgPr>
+        <a:pattFill prst="pct50">
+          <a:fgClr>
+            <a:srgbClr val="CEE0F3">
+              <a:alpha val="43211"/>
+            </a:srgbClr>
+          </a:fgClr>
+          <a:bgClr>
+            <a:srgbClr val="FFFFFF"/>
+          </a:bgClr>
+        </a:pattFill>
+        <a:effectLst/>
+      </p:bgPr>
+    </p:bg>
+    <p:spTree>
+      <p:nvGrpSpPr>
+        <p:cNvPr id="1" name=""/>
+        <p:cNvGrpSpPr/>
+        <p:nvPr/>
+      </p:nvGrpSpPr>
+      <p:grpSpPr/>
+      <p:sp>
+        <p:nvSpPr>
+          <p:cNvPr id="2" name="Marker"/>
+          <p:cNvSpPr txBox="1"/>
+          <p:nvPr/>
+        </p:nvSpPr>
+        <p:spPr>
+          <a:xfrm>
+            <a:off x="508000" y="508000"/>
+            <a:ext cx="3810000" cy="508000"/>
+          </a:xfrm>
+          <a:prstGeom prst="rect">
+            <a:avLst/>
+          </a:prstGeom>
+        </p:spPr>
+        <p:txBody>
+          <a:bodyPr/>
+          <a:lstStyle/>
+          <a:p>
+            <a:r>
+              <a:rPr lang="en-US"/>
+              <a:t>Pattern background alpha marker</a:t>
             </a:r>
           </a:p>
         </p:txBody>
